--- a/lectures/b02/ppt/b02-l11.pptx
+++ b/lectures/b02/ppt/b02-l11.pptx
@@ -4364,7 +4364,7 @@
                 <a:ea typeface="Malgun Gothic"/>
                 <a:cs typeface="Malgun Gothic"/>
               </a:rPr>
-              <a:t> 발견(2018), 알츠하이머 질환 연관 미세아교세포(DAM; TREM2 의존; B08 L04), COVID-19 중증에서 비정상 골수성 세포, CAR-T 반응 예측 세포 상태, 종양 내 이질성과 내성 지속 세포.</a:t>
+              <a:t> 발견(2018), 알츠하이머 질환 연관 미세아교세포(DAM; TREM2 의존; B08 L07), COVID-19 중증에서 비정상 골수성 세포, CAR-T 반응 예측 세포 상태, 종양 내 이질성과 내성 지속 세포.</a:t>
             </a:r>
           </a:p>
         </p:txBody>
